--- a/assets/pptx/catalog-539.pptx
+++ b/assets/pptx/catalog-539.pptx
@@ -3301,7 +3301,7 @@
                 <a:ea typeface="Ebrima"/>
                 <a:cs typeface="Ebrima"/>
               </a:rPr>
-              <a:t>ከክፉ ሁሉ ሁሉ አድነኸኛል (2x)</a:t>
+              <a:t>ከክፉ ሁሉ ሁሉ አድነኸኛል 2x</a:t>
             </a:r>
           </a:p>
         </p:txBody>
@@ -4027,7 +4027,7 @@
                 <a:ea typeface="Ebrima"/>
                 <a:cs typeface="Ebrima"/>
               </a:rPr>
-              <a:t>ከክፉ ሁሉ ሁሉ አድነኸኛል (4x)</a:t>
+              <a:t>ከክፉ ሁሉ ሁሉ አድነኸኛል 4x</a:t>
             </a:r>
           </a:p>
         </p:txBody>
